--- a/data/employees/EMP061/AST-EMP061-01.pptx
+++ b/data/employees/EMP061/AST-EMP061-01.pptx
@@ -9,6 +9,7 @@
     <p:sldId id="257" r:id="rId8"/>
     <p:sldId id="258" r:id="rId9"/>
     <p:sldId id="259" r:id="rId10"/>
+    <p:sldId id="260" r:id="rId11"/>
   </p:sldIdLst>
   <p:sldSz cx="9144000" cy="6858000" type="screen4x3"/>
   <p:notesSz cx="6858000" cy="9144000"/>
@@ -3098,42 +3099,55 @@
             <a:spLocks noGrp="1"/>
           </p:cNvSpPr>
           <p:nvPr>
-            <p:ph type="ctrTitle"/>
-          </p:nvPr>
-        </p:nvSpPr>
-        <p:spPr/>
-        <p:txBody>
-          <a:bodyPr/>
-          <a:lstStyle/>
-          <a:p>
-            <a:r>
-              <a:t>Project update deck - EMP061</a:t>
-            </a:r>
-          </a:p>
-        </p:txBody>
-      </p:sp>
-      <p:sp>
-        <p:nvSpPr>
-          <p:cNvPr id="3" name="Subtitle 2"/>
-          <p:cNvSpPr>
-            <a:spLocks noGrp="1"/>
-          </p:cNvSpPr>
-          <p:nvPr>
-            <p:ph type="subTitle" idx="1"/>
-          </p:nvPr>
-        </p:nvSpPr>
-        <p:spPr/>
-        <p:txBody>
-          <a:bodyPr/>
-          <a:lstStyle/>
-          <a:p>
-            <a:r>
-              <a:t>Alex Garcia | Senior Engineer | Procurement</a:t>
-            </a:r>
-          </a:p>
-          <a:p>
-            <a:r>
-              <a:t>Prepared: 2025-03-04</a:t>
+            <p:ph type="title"/>
+          </p:nvPr>
+        </p:nvSpPr>
+        <p:spPr/>
+        <p:txBody>
+          <a:bodyPr/>
+          <a:lstStyle/>
+          <a:p>
+            <a:r>
+              <a:t>Ast Emp061 01 - EMP061</a:t>
+            </a:r>
+          </a:p>
+        </p:txBody>
+      </p:sp>
+      <p:sp>
+        <p:nvSpPr>
+          <p:cNvPr id="3" name="Content Placeholder 2"/>
+          <p:cNvSpPr>
+            <a:spLocks noGrp="1"/>
+          </p:cNvSpPr>
+          <p:nvPr>
+            <p:ph idx="1"/>
+          </p:nvPr>
+        </p:nvSpPr>
+        <p:spPr/>
+        <p:txBody>
+          <a:bodyPr/>
+          <a:lstStyle/>
+          <a:p>
+            <a:r>
+              <a:t>Slide 1: Executive Summary</a:t>
+            </a:r>
+          </a:p>
+          <a:p>
+            <a:pPr lvl="1"/>
+            <a:r>
+              <a:t>Section 1: Operational risk review. EMP061 contributes to ast emp061 01 through recurring collaboration, clear ownership boundaries, and measurable outcomes. The team captures decisions, open issues, and handoffs so that knowledge remains discoverable for future programs.</a:t>
+            </a:r>
+          </a:p>
+          <a:p>
+            <a:pPr lvl="1"/>
+            <a:r>
+              <a:t>Section 2: Fabric semantic model planning. EMP061 contributes to ast emp061 01 through recurring collaboration, clear ownership boundaries, and measurable outcomes. The team captures decisions, open issues, and handoffs so that knowledge remains discoverable for future programs.</a:t>
+            </a:r>
+          </a:p>
+          <a:p>
+            <a:pPr lvl="1"/>
+            <a:r>
+              <a:t>Section 3: Operational risk review. EMP061 contributes to ast emp061 01 through recurring collaboration, clear ownership boundaries, and measurable outcomes. The team captures decisions, open issues, and handoffs so that knowledge remains discoverable for future programs.</a:t>
             </a:r>
           </a:p>
         </p:txBody>
@@ -3172,7 +3186,7 @@
           <a:lstStyle/>
           <a:p>
             <a:r>
-              <a:t>Vendor Scorecard Q2</a:t>
+              <a:t>Ast Emp061 01 - EMP061</a:t>
             </a:r>
           </a:p>
         </p:txBody>
@@ -3193,17 +3207,25 @@
           <a:lstStyle/>
           <a:p>
             <a:r>
-              <a:t>Overview of Vendor Scorecard Q2 for Procurement department.</a:t>
-            </a:r>
-          </a:p>
-          <a:p>
-            <a:r>
-              <a:t>Responsible: Alex Garcia (Senior Engineer)</a:t>
-            </a:r>
-          </a:p>
-          <a:p>
-            <a:r>
-              <a:t>Location: Bengaluru | Skills: Azure AI, Ontology, Power BI, TypeScript</a:t>
+              <a:t>Slide 2: Executive Summary</a:t>
+            </a:r>
+          </a:p>
+          <a:p>
+            <a:pPr lvl="1"/>
+            <a:r>
+              <a:t>Section 1: Customer escalation analysis. EMP061 contributes to ast emp061 01 through recurring collaboration, clear ownership boundaries, and measurable outcomes. The team captures decisions, open issues, and handoffs so that knowledge remains discoverable for future programs.</a:t>
+            </a:r>
+          </a:p>
+          <a:p>
+            <a:pPr lvl="1"/>
+            <a:r>
+              <a:t>Section 2: Knowledge transfer and onboarding. EMP061 contributes to ast emp061 01 through recurring collaboration, clear ownership boundaries, and measurable outcomes. The team captures decisions, open issues, and handoffs so that knowledge remains discoverable for future programs.</a:t>
+            </a:r>
+          </a:p>
+          <a:p>
+            <a:pPr lvl="1"/>
+            <a:r>
+              <a:t>Section 3: Quarterly delivery milestones. EMP061 contributes to ast emp061 01 through recurring collaboration, clear ownership boundaries, and measurable outcomes. The team captures decisions, open issues, and handoffs so that knowledge remains discoverable for future programs.</a:t>
             </a:r>
           </a:p>
         </p:txBody>
@@ -3242,7 +3264,7 @@
           <a:lstStyle/>
           <a:p>
             <a:r>
-              <a:t>Contract Renewals Pipeline</a:t>
+              <a:t>Ast Emp061 01 - EMP061</a:t>
             </a:r>
           </a:p>
         </p:txBody>
@@ -3263,17 +3285,25 @@
           <a:lstStyle/>
           <a:p>
             <a:r>
-              <a:t>Overview of Contract Renewals Pipeline for Procurement department.</a:t>
-            </a:r>
-          </a:p>
-          <a:p>
-            <a:r>
-              <a:t>Responsible: Alex Garcia (Senior Engineer)</a:t>
-            </a:r>
-          </a:p>
-          <a:p>
-            <a:r>
-              <a:t>Location: Bengaluru | Skills: Azure AI, Ontology, Power BI, TypeScript</a:t>
+              <a:t>Slide 3: Executive Summary</a:t>
+            </a:r>
+          </a:p>
+          <a:p>
+            <a:pPr lvl="1"/>
+            <a:r>
+              <a:t>Section 1: Fabric semantic model planning. EMP061 contributes to ast emp061 01 through recurring collaboration, clear ownership boundaries, and measurable outcomes. The team captures decisions, open issues, and handoffs so that knowledge remains discoverable for future programs.</a:t>
+            </a:r>
+          </a:p>
+          <a:p>
+            <a:pPr lvl="1"/>
+            <a:r>
+              <a:t>Section 2: Department KPI performance. EMP061 contributes to ast emp061 01 through recurring collaboration, clear ownership boundaries, and measurable outcomes. The team captures decisions, open issues, and handoffs so that knowledge remains discoverable for future programs.</a:t>
+            </a:r>
+          </a:p>
+          <a:p>
+            <a:pPr lvl="1"/>
+            <a:r>
+              <a:t>Section 3: Department KPI performance. EMP061 contributes to ast emp061 01 through recurring collaboration, clear ownership boundaries, and measurable outcomes. The team captures decisions, open issues, and handoffs so that knowledge remains discoverable for future programs.</a:t>
             </a:r>
           </a:p>
         </p:txBody>
@@ -3312,7 +3342,7 @@
           <a:lstStyle/>
           <a:p>
             <a:r>
-              <a:t>Category Spend Analysis</a:t>
+              <a:t>Ast Emp061 01 - EMP061</a:t>
             </a:r>
           </a:p>
         </p:txBody>
@@ -3333,17 +3363,103 @@
           <a:lstStyle/>
           <a:p>
             <a:r>
-              <a:t>Overview of Category Spend Analysis for Procurement department.</a:t>
-            </a:r>
-          </a:p>
-          <a:p>
-            <a:r>
-              <a:t>Responsible: Alex Garcia (Senior Engineer)</a:t>
-            </a:r>
-          </a:p>
-          <a:p>
-            <a:r>
-              <a:t>Location: Bengaluru | Skills: Azure AI, Ontology, Power BI, TypeScript</a:t>
+              <a:t>Slide 4: Executive Summary</a:t>
+            </a:r>
+          </a:p>
+          <a:p>
+            <a:pPr lvl="1"/>
+            <a:r>
+              <a:t>Section 1: Department KPI performance. EMP061 contributes to ast emp061 01 through recurring collaboration, clear ownership boundaries, and measurable outcomes. The team captures decisions, open issues, and handoffs so that knowledge remains discoverable for future programs.</a:t>
+            </a:r>
+          </a:p>
+          <a:p>
+            <a:pPr lvl="1"/>
+            <a:r>
+              <a:t>Section 2: Department KPI performance. EMP061 contributes to ast emp061 01 through recurring collaboration, clear ownership boundaries, and measurable outcomes. The team captures decisions, open issues, and handoffs so that knowledge remains discoverable for future programs.</a:t>
+            </a:r>
+          </a:p>
+          <a:p>
+            <a:pPr lvl="1"/>
+            <a:r>
+              <a:t>Section 3: Data quality remediation. EMP061 contributes to ast emp061 01 through recurring collaboration, clear ownership boundaries, and measurable outcomes. The team captures decisions, open issues, and handoffs so that knowledge remains discoverable for future programs.</a:t>
+            </a:r>
+          </a:p>
+        </p:txBody>
+      </p:sp>
+    </p:spTree>
+  </p:cSld>
+  <p:clrMapOvr>
+    <a:masterClrMapping/>
+  </p:clrMapOvr>
+</p:sld>
+</file>
+
+<file path=ppt/slides/slide5.xml><?xml version="1.0" encoding="utf-8"?>
+<p:sld xmlns:a="http://schemas.openxmlformats.org/drawingml/2006/main" xmlns:p="http://schemas.openxmlformats.org/presentationml/2006/main" xmlns:r="http://schemas.openxmlformats.org/officeDocument/2006/relationships">
+  <p:cSld>
+    <p:spTree>
+      <p:nvGrpSpPr>
+        <p:cNvPr id="1" name=""/>
+        <p:cNvGrpSpPr/>
+        <p:nvPr/>
+      </p:nvGrpSpPr>
+      <p:grpSpPr/>
+      <p:sp>
+        <p:nvSpPr>
+          <p:cNvPr id="2" name="Title 1"/>
+          <p:cNvSpPr>
+            <a:spLocks noGrp="1"/>
+          </p:cNvSpPr>
+          <p:nvPr>
+            <p:ph type="title"/>
+          </p:nvPr>
+        </p:nvSpPr>
+        <p:spPr/>
+        <p:txBody>
+          <a:bodyPr/>
+          <a:lstStyle/>
+          <a:p>
+            <a:r>
+              <a:t>Ast Emp061 01 - EMP061</a:t>
+            </a:r>
+          </a:p>
+        </p:txBody>
+      </p:sp>
+      <p:sp>
+        <p:nvSpPr>
+          <p:cNvPr id="3" name="Content Placeholder 2"/>
+          <p:cNvSpPr>
+            <a:spLocks noGrp="1"/>
+          </p:cNvSpPr>
+          <p:nvPr>
+            <p:ph idx="1"/>
+          </p:nvPr>
+        </p:nvSpPr>
+        <p:spPr/>
+        <p:txBody>
+          <a:bodyPr/>
+          <a:lstStyle/>
+          <a:p>
+            <a:r>
+              <a:t>Slide 5: Executive Summary</a:t>
+            </a:r>
+          </a:p>
+          <a:p>
+            <a:pPr lvl="1"/>
+            <a:r>
+              <a:t>Section 1: Customer escalation analysis. EMP061 contributes to ast emp061 01 through recurring collaboration, clear ownership boundaries, and measurable outcomes. The team captures decisions, open issues, and handoffs so that knowledge remains discoverable for future programs.</a:t>
+            </a:r>
+          </a:p>
+          <a:p>
+            <a:pPr lvl="1"/>
+            <a:r>
+              <a:t>Section 2: Operational risk review. EMP061 contributes to ast emp061 01 through recurring collaboration, clear ownership boundaries, and measurable outcomes. The team captures decisions, open issues, and handoffs so that knowledge remains discoverable for future programs.</a:t>
+            </a:r>
+          </a:p>
+          <a:p>
+            <a:pPr lvl="1"/>
+            <a:r>
+              <a:t>Section 3: Knowledge transfer and onboarding. EMP061 contributes to ast emp061 01 through recurring collaboration, clear ownership boundaries, and measurable outcomes. The team captures decisions, open issues, and handoffs so that knowledge remains discoverable for future programs.</a:t>
             </a:r>
           </a:p>
         </p:txBody>
